--- a/template.pptx
+++ b/template.pptx
@@ -1095,7 +1095,7 @@
         <p:txBody>
           <a:bodyPr vert="eaVert" anchor="ctr" lIns="91440" rIns="91440" tIns="45720" bIns="45720"/>
           <a:lstStyle>
-            <a:lvl1pPr algn="l" marL="338328" indent="-338328">
+            <a:lvl1pPr algn="l">
               <a:lnSpc>
                 <a:spcPct val="100000"/>
               </a:lnSpc>
@@ -1108,7 +1108,7 @@
                 </a:solidFill>
               </a:defRPr>
             </a:lvl1pPr>
-            <a:lvl2pPr marL="338328" indent="-338328">
+            <a:lvl2pPr>
               <a:lnSpc>
                 <a:spcPct val="100000"/>
               </a:lnSpc>
@@ -1121,7 +1121,7 @@
                 </a:solidFill>
               </a:defRPr>
             </a:lvl2pPr>
-            <a:lvl3pPr marL="338328" indent="-338328">
+            <a:lvl3pPr>
               <a:lnSpc>
                 <a:spcPct val="100000"/>
               </a:lnSpc>
@@ -1134,7 +1134,7 @@
                 </a:solidFill>
               </a:defRPr>
             </a:lvl3pPr>
-            <a:lvl4pPr marL="338328" indent="-338328">
+            <a:lvl4pPr>
               <a:lnSpc>
                 <a:spcPct val="100000"/>
               </a:lnSpc>
@@ -1147,7 +1147,7 @@
                 </a:solidFill>
               </a:defRPr>
             </a:lvl4pPr>
-            <a:lvl5pPr marL="338328" indent="-338328">
+            <a:lvl5pPr>
               <a:lnSpc>
                 <a:spcPct val="100000"/>
               </a:lnSpc>
@@ -1160,7 +1160,7 @@
                 </a:solidFill>
               </a:defRPr>
             </a:lvl5pPr>
-            <a:lvl6pPr marL="338328" indent="-338328">
+            <a:lvl6pPr>
               <a:lnSpc>
                 <a:spcPct val="100000"/>
               </a:lnSpc>
@@ -1173,7 +1173,7 @@
                 </a:solidFill>
               </a:defRPr>
             </a:lvl6pPr>
-            <a:lvl7pPr marL="338328" indent="-338328">
+            <a:lvl7pPr>
               <a:lnSpc>
                 <a:spcPct val="100000"/>
               </a:lnSpc>
@@ -1186,7 +1186,7 @@
                 </a:solidFill>
               </a:defRPr>
             </a:lvl7pPr>
-            <a:lvl8pPr marL="338328" indent="-338328">
+            <a:lvl8pPr>
               <a:lnSpc>
                 <a:spcPct val="100000"/>
               </a:lnSpc>
@@ -1199,7 +1199,7 @@
                 </a:solidFill>
               </a:defRPr>
             </a:lvl8pPr>
-            <a:lvl9pPr marL="338328" indent="-338328">
+            <a:lvl9pPr>
               <a:lnSpc>
                 <a:spcPct val="100000"/>
               </a:lnSpc>
@@ -1458,7 +1458,7 @@
         <p:txBody>
           <a:bodyPr vert="eaVert" anchor="ctr" lIns="91440" rIns="91440" tIns="45720" bIns="45720"/>
           <a:lstStyle>
-            <a:lvl1pPr algn="l" marL="338328" indent="-338328">
+            <a:lvl1pPr algn="l">
               <a:lnSpc>
                 <a:spcPct val="100000"/>
               </a:lnSpc>
@@ -1471,7 +1471,7 @@
                 </a:solidFill>
               </a:defRPr>
             </a:lvl1pPr>
-            <a:lvl2pPr marL="338328" indent="-338328">
+            <a:lvl2pPr>
               <a:lnSpc>
                 <a:spcPct val="100000"/>
               </a:lnSpc>
@@ -1484,7 +1484,7 @@
                 </a:solidFill>
               </a:defRPr>
             </a:lvl2pPr>
-            <a:lvl3pPr marL="338328" indent="-338328">
+            <a:lvl3pPr>
               <a:lnSpc>
                 <a:spcPct val="100000"/>
               </a:lnSpc>
@@ -1497,7 +1497,7 @@
                 </a:solidFill>
               </a:defRPr>
             </a:lvl3pPr>
-            <a:lvl4pPr marL="338328" indent="-338328">
+            <a:lvl4pPr>
               <a:lnSpc>
                 <a:spcPct val="100000"/>
               </a:lnSpc>
@@ -1510,7 +1510,7 @@
                 </a:solidFill>
               </a:defRPr>
             </a:lvl4pPr>
-            <a:lvl5pPr marL="338328" indent="-338328">
+            <a:lvl5pPr>
               <a:lnSpc>
                 <a:spcPct val="100000"/>
               </a:lnSpc>
@@ -1523,7 +1523,7 @@
                 </a:solidFill>
               </a:defRPr>
             </a:lvl5pPr>
-            <a:lvl6pPr marL="338328" indent="-338328">
+            <a:lvl6pPr>
               <a:lnSpc>
                 <a:spcPct val="100000"/>
               </a:lnSpc>
@@ -1536,7 +1536,7 @@
                 </a:solidFill>
               </a:defRPr>
             </a:lvl6pPr>
-            <a:lvl7pPr marL="338328" indent="-338328">
+            <a:lvl7pPr>
               <a:lnSpc>
                 <a:spcPct val="100000"/>
               </a:lnSpc>
@@ -1549,7 +1549,7 @@
                 </a:solidFill>
               </a:defRPr>
             </a:lvl7pPr>
-            <a:lvl8pPr marL="338328" indent="-338328">
+            <a:lvl8pPr>
               <a:lnSpc>
                 <a:spcPct val="100000"/>
               </a:lnSpc>
@@ -1562,7 +1562,7 @@
                 </a:solidFill>
               </a:defRPr>
             </a:lvl8pPr>
-            <a:lvl9pPr marL="338328" indent="-338328">
+            <a:lvl9pPr>
               <a:lnSpc>
                 <a:spcPct val="100000"/>
               </a:lnSpc>
@@ -1812,7 +1812,7 @@
         <p:txBody>
           <a:bodyPr anchor="ctr" lIns="91440" rIns="91440" tIns="45720" bIns="45720"/>
           <a:lstStyle>
-            <a:lvl1pPr algn="l" marL="338328" indent="-338328">
+            <a:lvl1pPr algn="l">
               <a:lnSpc>
                 <a:spcPct val="100000"/>
               </a:lnSpc>
@@ -1825,7 +1825,7 @@
                 </a:solidFill>
               </a:defRPr>
             </a:lvl1pPr>
-            <a:lvl2pPr marL="338328" indent="-338328">
+            <a:lvl2pPr>
               <a:lnSpc>
                 <a:spcPct val="100000"/>
               </a:lnSpc>
@@ -1838,7 +1838,7 @@
                 </a:solidFill>
               </a:defRPr>
             </a:lvl2pPr>
-            <a:lvl3pPr marL="338328" indent="-338328">
+            <a:lvl3pPr>
               <a:lnSpc>
                 <a:spcPct val="100000"/>
               </a:lnSpc>
@@ -1851,7 +1851,7 @@
                 </a:solidFill>
               </a:defRPr>
             </a:lvl3pPr>
-            <a:lvl4pPr marL="338328" indent="-338328">
+            <a:lvl4pPr>
               <a:lnSpc>
                 <a:spcPct val="100000"/>
               </a:lnSpc>
@@ -1864,7 +1864,7 @@
                 </a:solidFill>
               </a:defRPr>
             </a:lvl4pPr>
-            <a:lvl5pPr marL="338328" indent="-338328">
+            <a:lvl5pPr>
               <a:lnSpc>
                 <a:spcPct val="100000"/>
               </a:lnSpc>
@@ -1877,7 +1877,7 @@
                 </a:solidFill>
               </a:defRPr>
             </a:lvl5pPr>
-            <a:lvl6pPr marL="338328" indent="-338328">
+            <a:lvl6pPr>
               <a:lnSpc>
                 <a:spcPct val="100000"/>
               </a:lnSpc>
@@ -1890,7 +1890,7 @@
                 </a:solidFill>
               </a:defRPr>
             </a:lvl6pPr>
-            <a:lvl7pPr marL="338328" indent="-338328">
+            <a:lvl7pPr>
               <a:lnSpc>
                 <a:spcPct val="100000"/>
               </a:lnSpc>
@@ -1903,7 +1903,7 @@
                 </a:solidFill>
               </a:defRPr>
             </a:lvl7pPr>
-            <a:lvl8pPr marL="338328" indent="-338328">
+            <a:lvl8pPr>
               <a:lnSpc>
                 <a:spcPct val="100000"/>
               </a:lnSpc>
@@ -1916,7 +1916,7 @@
                 </a:solidFill>
               </a:defRPr>
             </a:lvl8pPr>
-            <a:lvl9pPr marL="338328" indent="-338328">
+            <a:lvl9pPr>
               <a:lnSpc>
                 <a:spcPct val="100000"/>
               </a:lnSpc>
@@ -2175,7 +2175,7 @@
         <p:txBody>
           <a:bodyPr anchor="ctr" lIns="91440" rIns="91440" tIns="45720" bIns="45720"/>
           <a:lstStyle>
-            <a:lvl1pPr marL="338328" indent="-338328" algn="l">
+            <a:lvl1pPr marL="0" indent="0" algn="l">
               <a:lnSpc>
                 <a:spcPct val="100000"/>
               </a:lnSpc>
@@ -2189,7 +2189,7 @@
                 </a:solidFill>
               </a:defRPr>
             </a:lvl1pPr>
-            <a:lvl2pPr marL="338328" indent="-338328">
+            <a:lvl2pPr marL="342900" indent="0">
               <a:lnSpc>
                 <a:spcPct val="100000"/>
               </a:lnSpc>
@@ -2203,7 +2203,7 @@
                 </a:solidFill>
               </a:defRPr>
             </a:lvl2pPr>
-            <a:lvl3pPr marL="338328" indent="-338328">
+            <a:lvl3pPr marL="685800" indent="0">
               <a:lnSpc>
                 <a:spcPct val="100000"/>
               </a:lnSpc>
@@ -2217,7 +2217,7 @@
                 </a:solidFill>
               </a:defRPr>
             </a:lvl3pPr>
-            <a:lvl4pPr marL="338328" indent="-338328">
+            <a:lvl4pPr marL="1028700" indent="0">
               <a:lnSpc>
                 <a:spcPct val="100000"/>
               </a:lnSpc>
@@ -2231,7 +2231,7 @@
                 </a:solidFill>
               </a:defRPr>
             </a:lvl4pPr>
-            <a:lvl5pPr marL="338328" indent="-338328">
+            <a:lvl5pPr marL="1371600" indent="0">
               <a:lnSpc>
                 <a:spcPct val="100000"/>
               </a:lnSpc>
@@ -2245,7 +2245,7 @@
                 </a:solidFill>
               </a:defRPr>
             </a:lvl5pPr>
-            <a:lvl6pPr marL="338328" indent="-338328">
+            <a:lvl6pPr marL="1714500" indent="0">
               <a:lnSpc>
                 <a:spcPct val="100000"/>
               </a:lnSpc>
@@ -2259,7 +2259,7 @@
                 </a:solidFill>
               </a:defRPr>
             </a:lvl6pPr>
-            <a:lvl7pPr marL="338328" indent="-338328">
+            <a:lvl7pPr marL="2057400" indent="0">
               <a:lnSpc>
                 <a:spcPct val="100000"/>
               </a:lnSpc>
@@ -2273,7 +2273,7 @@
                 </a:solidFill>
               </a:defRPr>
             </a:lvl7pPr>
-            <a:lvl8pPr marL="338328" indent="-338328">
+            <a:lvl8pPr marL="2400300" indent="0">
               <a:lnSpc>
                 <a:spcPct val="100000"/>
               </a:lnSpc>
@@ -2287,7 +2287,7 @@
                 </a:solidFill>
               </a:defRPr>
             </a:lvl8pPr>
-            <a:lvl9pPr marL="338328" indent="-338328">
+            <a:lvl9pPr marL="2743200" indent="0">
               <a:lnSpc>
                 <a:spcPct val="100000"/>
               </a:lnSpc>
@@ -2515,7 +2515,7 @@
         <p:txBody>
           <a:bodyPr anchor="ctr" lIns="91440" rIns="91440" tIns="45720" bIns="45720"/>
           <a:lstStyle>
-            <a:lvl1pPr algn="l" marL="338328" indent="-338328">
+            <a:lvl1pPr algn="l">
               <a:lnSpc>
                 <a:spcPct val="100000"/>
               </a:lnSpc>
@@ -2528,7 +2528,7 @@
                 </a:solidFill>
               </a:defRPr>
             </a:lvl1pPr>
-            <a:lvl2pPr marL="338328" indent="-338328">
+            <a:lvl2pPr>
               <a:lnSpc>
                 <a:spcPct val="100000"/>
               </a:lnSpc>
@@ -2541,7 +2541,7 @@
                 </a:solidFill>
               </a:defRPr>
             </a:lvl2pPr>
-            <a:lvl3pPr marL="338328" indent="-338328">
+            <a:lvl3pPr>
               <a:lnSpc>
                 <a:spcPct val="100000"/>
               </a:lnSpc>
@@ -2554,7 +2554,7 @@
                 </a:solidFill>
               </a:defRPr>
             </a:lvl3pPr>
-            <a:lvl4pPr marL="338328" indent="-338328">
+            <a:lvl4pPr>
               <a:lnSpc>
                 <a:spcPct val="100000"/>
               </a:lnSpc>
@@ -2567,7 +2567,7 @@
                 </a:solidFill>
               </a:defRPr>
             </a:lvl4pPr>
-            <a:lvl5pPr marL="338328" indent="-338328">
+            <a:lvl5pPr>
               <a:lnSpc>
                 <a:spcPct val="100000"/>
               </a:lnSpc>
@@ -2580,7 +2580,7 @@
                 </a:solidFill>
               </a:defRPr>
             </a:lvl5pPr>
-            <a:lvl6pPr marL="338328" indent="-338328">
+            <a:lvl6pPr>
               <a:lnSpc>
                 <a:spcPct val="100000"/>
               </a:lnSpc>
@@ -2593,7 +2593,7 @@
                 </a:solidFill>
               </a:defRPr>
             </a:lvl6pPr>
-            <a:lvl7pPr marL="338328" indent="-338328">
+            <a:lvl7pPr>
               <a:lnSpc>
                 <a:spcPct val="100000"/>
               </a:lnSpc>
@@ -2606,7 +2606,7 @@
                 </a:solidFill>
               </a:defRPr>
             </a:lvl7pPr>
-            <a:lvl8pPr marL="338328" indent="-338328">
+            <a:lvl8pPr>
               <a:lnSpc>
                 <a:spcPct val="100000"/>
               </a:lnSpc>
@@ -2619,7 +2619,7 @@
                 </a:solidFill>
               </a:defRPr>
             </a:lvl8pPr>
-            <a:lvl9pPr marL="338328" indent="-338328">
+            <a:lvl9pPr>
               <a:lnSpc>
                 <a:spcPct val="100000"/>
               </a:lnSpc>
@@ -2689,7 +2689,7 @@
         <p:txBody>
           <a:bodyPr anchor="ctr" lIns="91440" rIns="91440" tIns="45720" bIns="45720"/>
           <a:lstStyle>
-            <a:lvl1pPr algn="l" marL="338328" indent="-338328">
+            <a:lvl1pPr algn="l">
               <a:lnSpc>
                 <a:spcPct val="100000"/>
               </a:lnSpc>
@@ -2702,7 +2702,7 @@
                 </a:solidFill>
               </a:defRPr>
             </a:lvl1pPr>
-            <a:lvl2pPr marL="338328" indent="-338328">
+            <a:lvl2pPr>
               <a:lnSpc>
                 <a:spcPct val="100000"/>
               </a:lnSpc>
@@ -2715,7 +2715,7 @@
                 </a:solidFill>
               </a:defRPr>
             </a:lvl2pPr>
-            <a:lvl3pPr marL="338328" indent="-338328">
+            <a:lvl3pPr>
               <a:lnSpc>
                 <a:spcPct val="100000"/>
               </a:lnSpc>
@@ -2728,7 +2728,7 @@
                 </a:solidFill>
               </a:defRPr>
             </a:lvl3pPr>
-            <a:lvl4pPr marL="338328" indent="-338328">
+            <a:lvl4pPr>
               <a:lnSpc>
                 <a:spcPct val="100000"/>
               </a:lnSpc>
@@ -2741,7 +2741,7 @@
                 </a:solidFill>
               </a:defRPr>
             </a:lvl4pPr>
-            <a:lvl5pPr marL="338328" indent="-338328">
+            <a:lvl5pPr>
               <a:lnSpc>
                 <a:spcPct val="100000"/>
               </a:lnSpc>
@@ -2754,7 +2754,7 @@
                 </a:solidFill>
               </a:defRPr>
             </a:lvl5pPr>
-            <a:lvl6pPr marL="338328" indent="-338328">
+            <a:lvl6pPr>
               <a:lnSpc>
                 <a:spcPct val="100000"/>
               </a:lnSpc>
@@ -2767,7 +2767,7 @@
                 </a:solidFill>
               </a:defRPr>
             </a:lvl6pPr>
-            <a:lvl7pPr marL="338328" indent="-338328">
+            <a:lvl7pPr>
               <a:lnSpc>
                 <a:spcPct val="100000"/>
               </a:lnSpc>
@@ -2780,7 +2780,7 @@
                 </a:solidFill>
               </a:defRPr>
             </a:lvl7pPr>
-            <a:lvl8pPr marL="338328" indent="-338328">
+            <a:lvl8pPr>
               <a:lnSpc>
                 <a:spcPct val="100000"/>
               </a:lnSpc>
@@ -2793,7 +2793,7 @@
                 </a:solidFill>
               </a:defRPr>
             </a:lvl8pPr>
-            <a:lvl9pPr marL="338328" indent="-338328">
+            <a:lvl9pPr>
               <a:lnSpc>
                 <a:spcPct val="100000"/>
               </a:lnSpc>
@@ -3048,7 +3048,7 @@
         <p:txBody>
           <a:bodyPr anchor="ctr" lIns="91440" rIns="91440" tIns="45720" bIns="45720"/>
           <a:lstStyle>
-            <a:lvl1pPr marL="338328" indent="-338328" algn="l">
+            <a:lvl1pPr marL="0" indent="0" algn="l">
               <a:lnSpc>
                 <a:spcPct val="100000"/>
               </a:lnSpc>
@@ -3062,7 +3062,7 @@
                 </a:solidFill>
               </a:defRPr>
             </a:lvl1pPr>
-            <a:lvl2pPr marL="338328" indent="-338328">
+            <a:lvl2pPr marL="342900" indent="0">
               <a:lnSpc>
                 <a:spcPct val="100000"/>
               </a:lnSpc>
@@ -3076,7 +3076,7 @@
                 </a:solidFill>
               </a:defRPr>
             </a:lvl2pPr>
-            <a:lvl3pPr marL="338328" indent="-338328">
+            <a:lvl3pPr marL="685800" indent="0">
               <a:lnSpc>
                 <a:spcPct val="100000"/>
               </a:lnSpc>
@@ -3090,7 +3090,7 @@
                 </a:solidFill>
               </a:defRPr>
             </a:lvl3pPr>
-            <a:lvl4pPr marL="338328" indent="-338328">
+            <a:lvl4pPr marL="1028700" indent="0">
               <a:lnSpc>
                 <a:spcPct val="100000"/>
               </a:lnSpc>
@@ -3104,7 +3104,7 @@
                 </a:solidFill>
               </a:defRPr>
             </a:lvl4pPr>
-            <a:lvl5pPr marL="338328" indent="-338328">
+            <a:lvl5pPr marL="1371600" indent="0">
               <a:lnSpc>
                 <a:spcPct val="100000"/>
               </a:lnSpc>
@@ -3118,7 +3118,7 @@
                 </a:solidFill>
               </a:defRPr>
             </a:lvl5pPr>
-            <a:lvl6pPr marL="338328" indent="-338328">
+            <a:lvl6pPr marL="1714500" indent="0">
               <a:lnSpc>
                 <a:spcPct val="100000"/>
               </a:lnSpc>
@@ -3132,7 +3132,7 @@
                 </a:solidFill>
               </a:defRPr>
             </a:lvl6pPr>
-            <a:lvl7pPr marL="338328" indent="-338328">
+            <a:lvl7pPr marL="2057400" indent="0">
               <a:lnSpc>
                 <a:spcPct val="100000"/>
               </a:lnSpc>
@@ -3146,7 +3146,7 @@
                 </a:solidFill>
               </a:defRPr>
             </a:lvl7pPr>
-            <a:lvl8pPr marL="338328" indent="-338328">
+            <a:lvl8pPr marL="2400300" indent="0">
               <a:lnSpc>
                 <a:spcPct val="100000"/>
               </a:lnSpc>
@@ -3160,7 +3160,7 @@
                 </a:solidFill>
               </a:defRPr>
             </a:lvl8pPr>
-            <a:lvl9pPr marL="338328" indent="-338328">
+            <a:lvl9pPr marL="2743200" indent="0">
               <a:lnSpc>
                 <a:spcPct val="100000"/>
               </a:lnSpc>
@@ -3203,7 +3203,7 @@
         <p:txBody>
           <a:bodyPr anchor="ctr" lIns="91440" rIns="91440" tIns="45720" bIns="45720"/>
           <a:lstStyle>
-            <a:lvl1pPr algn="l" marL="338328" indent="-338328">
+            <a:lvl1pPr algn="l">
               <a:lnSpc>
                 <a:spcPct val="100000"/>
               </a:lnSpc>
@@ -3216,7 +3216,7 @@
                 </a:solidFill>
               </a:defRPr>
             </a:lvl1pPr>
-            <a:lvl2pPr marL="338328" indent="-338328">
+            <a:lvl2pPr>
               <a:lnSpc>
                 <a:spcPct val="100000"/>
               </a:lnSpc>
@@ -3229,7 +3229,7 @@
                 </a:solidFill>
               </a:defRPr>
             </a:lvl2pPr>
-            <a:lvl3pPr marL="338328" indent="-338328">
+            <a:lvl3pPr>
               <a:lnSpc>
                 <a:spcPct val="100000"/>
               </a:lnSpc>
@@ -3242,7 +3242,7 @@
                 </a:solidFill>
               </a:defRPr>
             </a:lvl3pPr>
-            <a:lvl4pPr marL="338328" indent="-338328">
+            <a:lvl4pPr>
               <a:lnSpc>
                 <a:spcPct val="100000"/>
               </a:lnSpc>
@@ -3255,7 +3255,7 @@
                 </a:solidFill>
               </a:defRPr>
             </a:lvl4pPr>
-            <a:lvl5pPr marL="338328" indent="-338328">
+            <a:lvl5pPr>
               <a:lnSpc>
                 <a:spcPct val="100000"/>
               </a:lnSpc>
@@ -3268,7 +3268,7 @@
                 </a:solidFill>
               </a:defRPr>
             </a:lvl5pPr>
-            <a:lvl6pPr marL="338328" indent="-338328">
+            <a:lvl6pPr>
               <a:lnSpc>
                 <a:spcPct val="100000"/>
               </a:lnSpc>
@@ -3281,7 +3281,7 @@
                 </a:solidFill>
               </a:defRPr>
             </a:lvl6pPr>
-            <a:lvl7pPr marL="338328" indent="-338328">
+            <a:lvl7pPr>
               <a:lnSpc>
                 <a:spcPct val="100000"/>
               </a:lnSpc>
@@ -3294,7 +3294,7 @@
                 </a:solidFill>
               </a:defRPr>
             </a:lvl7pPr>
-            <a:lvl8pPr marL="338328" indent="-338328">
+            <a:lvl8pPr>
               <a:lnSpc>
                 <a:spcPct val="100000"/>
               </a:lnSpc>
@@ -3307,7 +3307,7 @@
                 </a:solidFill>
               </a:defRPr>
             </a:lvl8pPr>
-            <a:lvl9pPr marL="338328" indent="-338328">
+            <a:lvl9pPr>
               <a:lnSpc>
                 <a:spcPct val="100000"/>
               </a:lnSpc>
@@ -3377,7 +3377,7 @@
         <p:txBody>
           <a:bodyPr anchor="ctr" lIns="91440" rIns="91440" tIns="45720" bIns="45720"/>
           <a:lstStyle>
-            <a:lvl1pPr marL="338328" indent="-338328" algn="l">
+            <a:lvl1pPr marL="0" indent="0" algn="l">
               <a:lnSpc>
                 <a:spcPct val="100000"/>
               </a:lnSpc>
@@ -3391,7 +3391,7 @@
                 </a:solidFill>
               </a:defRPr>
             </a:lvl1pPr>
-            <a:lvl2pPr marL="338328" indent="-338328">
+            <a:lvl2pPr marL="342900" indent="0">
               <a:lnSpc>
                 <a:spcPct val="100000"/>
               </a:lnSpc>
@@ -3405,7 +3405,7 @@
                 </a:solidFill>
               </a:defRPr>
             </a:lvl2pPr>
-            <a:lvl3pPr marL="338328" indent="-338328">
+            <a:lvl3pPr marL="685800" indent="0">
               <a:lnSpc>
                 <a:spcPct val="100000"/>
               </a:lnSpc>
@@ -3419,7 +3419,7 @@
                 </a:solidFill>
               </a:defRPr>
             </a:lvl3pPr>
-            <a:lvl4pPr marL="338328" indent="-338328">
+            <a:lvl4pPr marL="1028700" indent="0">
               <a:lnSpc>
                 <a:spcPct val="100000"/>
               </a:lnSpc>
@@ -3433,7 +3433,7 @@
                 </a:solidFill>
               </a:defRPr>
             </a:lvl4pPr>
-            <a:lvl5pPr marL="338328" indent="-338328">
+            <a:lvl5pPr marL="1371600" indent="0">
               <a:lnSpc>
                 <a:spcPct val="100000"/>
               </a:lnSpc>
@@ -3447,7 +3447,7 @@
                 </a:solidFill>
               </a:defRPr>
             </a:lvl5pPr>
-            <a:lvl6pPr marL="338328" indent="-338328">
+            <a:lvl6pPr marL="1714500" indent="0">
               <a:lnSpc>
                 <a:spcPct val="100000"/>
               </a:lnSpc>
@@ -3461,7 +3461,7 @@
                 </a:solidFill>
               </a:defRPr>
             </a:lvl6pPr>
-            <a:lvl7pPr marL="338328" indent="-338328">
+            <a:lvl7pPr marL="2057400" indent="0">
               <a:lnSpc>
                 <a:spcPct val="100000"/>
               </a:lnSpc>
@@ -3475,7 +3475,7 @@
                 </a:solidFill>
               </a:defRPr>
             </a:lvl7pPr>
-            <a:lvl8pPr marL="338328" indent="-338328">
+            <a:lvl8pPr marL="2400300" indent="0">
               <a:lnSpc>
                 <a:spcPct val="100000"/>
               </a:lnSpc>
@@ -3489,7 +3489,7 @@
                 </a:solidFill>
               </a:defRPr>
             </a:lvl8pPr>
-            <a:lvl9pPr marL="338328" indent="-338328">
+            <a:lvl9pPr marL="2743200" indent="0">
               <a:lnSpc>
                 <a:spcPct val="100000"/>
               </a:lnSpc>
@@ -3532,7 +3532,7 @@
         <p:txBody>
           <a:bodyPr anchor="ctr" lIns="91440" rIns="91440" tIns="45720" bIns="45720"/>
           <a:lstStyle>
-            <a:lvl1pPr algn="l" marL="338328" indent="-338328">
+            <a:lvl1pPr algn="l">
               <a:lnSpc>
                 <a:spcPct val="100000"/>
               </a:lnSpc>
@@ -3545,7 +3545,7 @@
                 </a:solidFill>
               </a:defRPr>
             </a:lvl1pPr>
-            <a:lvl2pPr marL="338328" indent="-338328">
+            <a:lvl2pPr>
               <a:lnSpc>
                 <a:spcPct val="100000"/>
               </a:lnSpc>
@@ -3558,7 +3558,7 @@
                 </a:solidFill>
               </a:defRPr>
             </a:lvl2pPr>
-            <a:lvl3pPr marL="338328" indent="-338328">
+            <a:lvl3pPr>
               <a:lnSpc>
                 <a:spcPct val="100000"/>
               </a:lnSpc>
@@ -3571,7 +3571,7 @@
                 </a:solidFill>
               </a:defRPr>
             </a:lvl3pPr>
-            <a:lvl4pPr marL="338328" indent="-338328">
+            <a:lvl4pPr>
               <a:lnSpc>
                 <a:spcPct val="100000"/>
               </a:lnSpc>
@@ -3584,7 +3584,7 @@
                 </a:solidFill>
               </a:defRPr>
             </a:lvl4pPr>
-            <a:lvl5pPr marL="338328" indent="-338328">
+            <a:lvl5pPr>
               <a:lnSpc>
                 <a:spcPct val="100000"/>
               </a:lnSpc>
@@ -3597,7 +3597,7 @@
                 </a:solidFill>
               </a:defRPr>
             </a:lvl5pPr>
-            <a:lvl6pPr marL="338328" indent="-338328">
+            <a:lvl6pPr>
               <a:lnSpc>
                 <a:spcPct val="100000"/>
               </a:lnSpc>
@@ -3610,7 +3610,7 @@
                 </a:solidFill>
               </a:defRPr>
             </a:lvl6pPr>
-            <a:lvl7pPr marL="338328" indent="-338328">
+            <a:lvl7pPr>
               <a:lnSpc>
                 <a:spcPct val="100000"/>
               </a:lnSpc>
@@ -3623,7 +3623,7 @@
                 </a:solidFill>
               </a:defRPr>
             </a:lvl7pPr>
-            <a:lvl8pPr marL="338328" indent="-338328">
+            <a:lvl8pPr>
               <a:lnSpc>
                 <a:spcPct val="100000"/>
               </a:lnSpc>
@@ -3636,7 +3636,7 @@
                 </a:solidFill>
               </a:defRPr>
             </a:lvl8pPr>
-            <a:lvl9pPr marL="338328" indent="-338328">
+            <a:lvl9pPr>
               <a:lnSpc>
                 <a:spcPct val="100000"/>
               </a:lnSpc>
@@ -4175,7 +4175,7 @@
         <p:txBody>
           <a:bodyPr anchor="ctr" lIns="91440" rIns="91440" tIns="45720" bIns="45720"/>
           <a:lstStyle>
-            <a:lvl1pPr algn="l" marL="338328" indent="-338328">
+            <a:lvl1pPr algn="l">
               <a:lnSpc>
                 <a:spcPct val="100000"/>
               </a:lnSpc>
@@ -4188,7 +4188,7 @@
                 </a:solidFill>
               </a:defRPr>
             </a:lvl1pPr>
-            <a:lvl2pPr marL="338328" indent="-338328">
+            <a:lvl2pPr>
               <a:lnSpc>
                 <a:spcPct val="100000"/>
               </a:lnSpc>
@@ -4201,7 +4201,7 @@
                 </a:solidFill>
               </a:defRPr>
             </a:lvl2pPr>
-            <a:lvl3pPr marL="338328" indent="-338328">
+            <a:lvl3pPr>
               <a:lnSpc>
                 <a:spcPct val="100000"/>
               </a:lnSpc>
@@ -4214,7 +4214,7 @@
                 </a:solidFill>
               </a:defRPr>
             </a:lvl3pPr>
-            <a:lvl4pPr marL="338328" indent="-338328">
+            <a:lvl4pPr>
               <a:lnSpc>
                 <a:spcPct val="100000"/>
               </a:lnSpc>
@@ -4227,7 +4227,7 @@
                 </a:solidFill>
               </a:defRPr>
             </a:lvl4pPr>
-            <a:lvl5pPr marL="338328" indent="-338328">
+            <a:lvl5pPr>
               <a:lnSpc>
                 <a:spcPct val="100000"/>
               </a:lnSpc>
@@ -4240,7 +4240,7 @@
                 </a:solidFill>
               </a:defRPr>
             </a:lvl5pPr>
-            <a:lvl6pPr marL="338328" indent="-338328">
+            <a:lvl6pPr>
               <a:lnSpc>
                 <a:spcPct val="100000"/>
               </a:lnSpc>
@@ -4253,7 +4253,7 @@
                 </a:solidFill>
               </a:defRPr>
             </a:lvl6pPr>
-            <a:lvl7pPr marL="338328" indent="-338328">
+            <a:lvl7pPr>
               <a:lnSpc>
                 <a:spcPct val="100000"/>
               </a:lnSpc>
@@ -4266,7 +4266,7 @@
                 </a:solidFill>
               </a:defRPr>
             </a:lvl7pPr>
-            <a:lvl8pPr marL="338328" indent="-338328">
+            <a:lvl8pPr>
               <a:lnSpc>
                 <a:spcPct val="100000"/>
               </a:lnSpc>
@@ -4279,7 +4279,7 @@
                 </a:solidFill>
               </a:defRPr>
             </a:lvl8pPr>
-            <a:lvl9pPr marL="338328" indent="-338328">
+            <a:lvl9pPr>
               <a:lnSpc>
                 <a:spcPct val="100000"/>
               </a:lnSpc>
@@ -4349,7 +4349,7 @@
         <p:txBody>
           <a:bodyPr anchor="ctr" lIns="91440" rIns="91440" tIns="45720" bIns="45720"/>
           <a:lstStyle>
-            <a:lvl1pPr marL="338328" indent="-338328" algn="l">
+            <a:lvl1pPr marL="0" indent="0" algn="l">
               <a:lnSpc>
                 <a:spcPct val="100000"/>
               </a:lnSpc>
@@ -4363,7 +4363,7 @@
                 </a:solidFill>
               </a:defRPr>
             </a:lvl1pPr>
-            <a:lvl2pPr marL="338328" indent="-338328">
+            <a:lvl2pPr marL="342900" indent="0">
               <a:lnSpc>
                 <a:spcPct val="100000"/>
               </a:lnSpc>
@@ -4377,7 +4377,7 @@
                 </a:solidFill>
               </a:defRPr>
             </a:lvl2pPr>
-            <a:lvl3pPr marL="338328" indent="-338328">
+            <a:lvl3pPr marL="685800" indent="0">
               <a:lnSpc>
                 <a:spcPct val="100000"/>
               </a:lnSpc>
@@ -4391,7 +4391,7 @@
                 </a:solidFill>
               </a:defRPr>
             </a:lvl3pPr>
-            <a:lvl4pPr marL="338328" indent="-338328">
+            <a:lvl4pPr marL="1028700" indent="0">
               <a:lnSpc>
                 <a:spcPct val="100000"/>
               </a:lnSpc>
@@ -4405,7 +4405,7 @@
                 </a:solidFill>
               </a:defRPr>
             </a:lvl4pPr>
-            <a:lvl5pPr marL="338328" indent="-338328">
+            <a:lvl5pPr marL="1371600" indent="0">
               <a:lnSpc>
                 <a:spcPct val="100000"/>
               </a:lnSpc>
@@ -4419,7 +4419,7 @@
                 </a:solidFill>
               </a:defRPr>
             </a:lvl5pPr>
-            <a:lvl6pPr marL="338328" indent="-338328">
+            <a:lvl6pPr marL="1714500" indent="0">
               <a:lnSpc>
                 <a:spcPct val="100000"/>
               </a:lnSpc>
@@ -4433,7 +4433,7 @@
                 </a:solidFill>
               </a:defRPr>
             </a:lvl6pPr>
-            <a:lvl7pPr marL="338328" indent="-338328">
+            <a:lvl7pPr marL="2057400" indent="0">
               <a:lnSpc>
                 <a:spcPct val="100000"/>
               </a:lnSpc>
@@ -4447,7 +4447,7 @@
                 </a:solidFill>
               </a:defRPr>
             </a:lvl7pPr>
-            <a:lvl8pPr marL="338328" indent="-338328">
+            <a:lvl8pPr marL="2400300" indent="0">
               <a:lnSpc>
                 <a:spcPct val="100000"/>
               </a:lnSpc>
@@ -4461,7 +4461,7 @@
                 </a:solidFill>
               </a:defRPr>
             </a:lvl8pPr>
-            <a:lvl9pPr marL="338328" indent="-338328">
+            <a:lvl9pPr marL="2743200" indent="0">
               <a:lnSpc>
                 <a:spcPct val="100000"/>
               </a:lnSpc>
@@ -4754,7 +4754,7 @@
         <p:txBody>
           <a:bodyPr anchor="ctr" lIns="91440" rIns="91440" tIns="45720" bIns="45720"/>
           <a:lstStyle>
-            <a:lvl1pPr marL="338328" indent="-338328" algn="l">
+            <a:lvl1pPr marL="0" indent="0" algn="l">
               <a:lnSpc>
                 <a:spcPct val="100000"/>
               </a:lnSpc>
@@ -4768,7 +4768,7 @@
                 </a:solidFill>
               </a:defRPr>
             </a:lvl1pPr>
-            <a:lvl2pPr marL="338328" indent="-338328">
+            <a:lvl2pPr marL="342900" indent="0">
               <a:lnSpc>
                 <a:spcPct val="100000"/>
               </a:lnSpc>
@@ -4782,7 +4782,7 @@
                 </a:solidFill>
               </a:defRPr>
             </a:lvl2pPr>
-            <a:lvl3pPr marL="338328" indent="-338328">
+            <a:lvl3pPr marL="685800" indent="0">
               <a:lnSpc>
                 <a:spcPct val="100000"/>
               </a:lnSpc>
@@ -4796,7 +4796,7 @@
                 </a:solidFill>
               </a:defRPr>
             </a:lvl3pPr>
-            <a:lvl4pPr marL="338328" indent="-338328">
+            <a:lvl4pPr marL="1028700" indent="0">
               <a:lnSpc>
                 <a:spcPct val="100000"/>
               </a:lnSpc>
@@ -4810,7 +4810,7 @@
                 </a:solidFill>
               </a:defRPr>
             </a:lvl4pPr>
-            <a:lvl5pPr marL="338328" indent="-338328">
+            <a:lvl5pPr marL="1371600" indent="0">
               <a:lnSpc>
                 <a:spcPct val="100000"/>
               </a:lnSpc>
@@ -4824,7 +4824,7 @@
                 </a:solidFill>
               </a:defRPr>
             </a:lvl5pPr>
-            <a:lvl6pPr marL="338328" indent="-338328">
+            <a:lvl6pPr marL="1714500" indent="0">
               <a:lnSpc>
                 <a:spcPct val="100000"/>
               </a:lnSpc>
@@ -4838,7 +4838,7 @@
                 </a:solidFill>
               </a:defRPr>
             </a:lvl6pPr>
-            <a:lvl7pPr marL="338328" indent="-338328">
+            <a:lvl7pPr marL="2057400" indent="0">
               <a:lnSpc>
                 <a:spcPct val="100000"/>
               </a:lnSpc>
@@ -4852,7 +4852,7 @@
                 </a:solidFill>
               </a:defRPr>
             </a:lvl7pPr>
-            <a:lvl8pPr marL="338328" indent="-338328">
+            <a:lvl8pPr marL="2400300" indent="0">
               <a:lnSpc>
                 <a:spcPct val="100000"/>
               </a:lnSpc>
@@ -4866,7 +4866,7 @@
                 </a:solidFill>
               </a:defRPr>
             </a:lvl8pPr>
-            <a:lvl9pPr marL="338328" indent="-338328">
+            <a:lvl9pPr marL="2743200" indent="0">
               <a:lnSpc>
                 <a:spcPct val="100000"/>
               </a:lnSpc>
@@ -5113,7 +5113,7 @@
             <a:normAutofit/>
           </a:bodyPr>
           <a:lstStyle>
-            <a:lvl1pPr algn="l" marL="338328" indent="-338328">
+            <a:lvl1pPr algn="l">
               <a:lnSpc>
                 <a:spcPct val="100000"/>
               </a:lnSpc>
@@ -5126,7 +5126,7 @@
                 </a:solidFill>
               </a:defRPr>
             </a:lvl1pPr>
-            <a:lvl2pPr marL="338328" indent="-338328">
+            <a:lvl2pPr>
               <a:lnSpc>
                 <a:spcPct val="100000"/>
               </a:lnSpc>
@@ -5139,7 +5139,7 @@
                 </a:solidFill>
               </a:defRPr>
             </a:lvl2pPr>
-            <a:lvl3pPr marL="338328" indent="-338328">
+            <a:lvl3pPr>
               <a:lnSpc>
                 <a:spcPct val="100000"/>
               </a:lnSpc>
@@ -5152,7 +5152,7 @@
                 </a:solidFill>
               </a:defRPr>
             </a:lvl3pPr>
-            <a:lvl4pPr marL="338328" indent="-338328">
+            <a:lvl4pPr>
               <a:lnSpc>
                 <a:spcPct val="100000"/>
               </a:lnSpc>
@@ -5165,7 +5165,7 @@
                 </a:solidFill>
               </a:defRPr>
             </a:lvl4pPr>
-            <a:lvl5pPr marL="338328" indent="-338328">
+            <a:lvl5pPr>
               <a:lnSpc>
                 <a:spcPct val="100000"/>
               </a:lnSpc>
@@ -5178,7 +5178,7 @@
                 </a:solidFill>
               </a:defRPr>
             </a:lvl5pPr>
-            <a:lvl6pPr marL="338328" indent="-338328">
+            <a:lvl6pPr>
               <a:lnSpc>
                 <a:spcPct val="100000"/>
               </a:lnSpc>
@@ -5191,7 +5191,7 @@
                 </a:solidFill>
               </a:defRPr>
             </a:lvl6pPr>
-            <a:lvl7pPr marL="338328" indent="-338328">
+            <a:lvl7pPr>
               <a:lnSpc>
                 <a:spcPct val="100000"/>
               </a:lnSpc>
@@ -5204,7 +5204,7 @@
                 </a:solidFill>
               </a:defRPr>
             </a:lvl7pPr>
-            <a:lvl8pPr marL="338328" indent="-338328">
+            <a:lvl8pPr>
               <a:lnSpc>
                 <a:spcPct val="100000"/>
               </a:lnSpc>
@@ -5217,7 +5217,7 @@
                 </a:solidFill>
               </a:defRPr>
             </a:lvl8pPr>
-            <a:lvl9pPr marL="338328" indent="-338328">
+            <a:lvl9pPr>
               <a:lnSpc>
                 <a:spcPct val="100000"/>
               </a:lnSpc>
